--- a/curso/pptx/S80.pptx
+++ b/curso/pptx/S80.pptx
@@ -4830,7 +4830,7 @@
                 </a:solidFill>
                 <a:latin typeface="Nunito Sans"/>
               </a:rPr>
-              <a:t>«Mi familia es la normal»</a:t>
+              <a:t>“我的家庭是正常的”</a:t>
             </a:r>
           </a:p>
           <a:p>
@@ -4855,7 +4855,7 @@
                 </a:solidFill>
                 <a:latin typeface="Nunito Sans"/>
               </a:rPr>
-              <a:t>«En todas las casas se hace como en la mía»</a:t>
+              <a:t>“每家都和我家一样”</a:t>
             </a:r>
           </a:p>
           <a:p>
@@ -4880,7 +4880,7 @@
                 </a:solidFill>
                 <a:latin typeface="Nunito Sans"/>
               </a:rPr>
-              <a:t>«Las otras familias son raras»</a:t>
+              <a:t>“别的家庭很奇怪”</a:t>
             </a:r>
           </a:p>
         </p:txBody>
@@ -5010,7 +5010,7 @@
                 </a:solidFill>
                 <a:latin typeface="Nunito Sans"/>
               </a:rPr>
-              <a:t>Mi familia es </a:t>
+              <a:t>我的家庭只是众多家庭中的</a:t>
             </a:r>
             <a:r>
               <a:rPr sz="2600" b="1">
@@ -5019,7 +5019,23 @@
                 </a:solidFill>
                 <a:latin typeface="Nunito Sans"/>
               </a:rPr>
-              <a:t>una</a:t>
+              <a:t>一种</a:t>
+            </a:r>
+          </a:p>
+          <a:p>
+            <a:pPr>
+              <a:spcAft>
+                <a:spcPts val="1170"/>
+              </a:spcAft>
+            </a:pPr>
+            <a:r>
+              <a:rPr sz="2600" b="1">
+                <a:solidFill>
+                  <a:srgbClr val="E8793A"/>
+                </a:solidFill>
+                <a:latin typeface="Nunito Sans"/>
+              </a:rPr>
+              <a:t>• </a:t>
             </a:r>
             <a:r>
               <a:rPr sz="2600" b="0">
@@ -5028,7 +5044,7 @@
                 </a:solidFill>
                 <a:latin typeface="Nunito Sans"/>
               </a:rPr>
-              <a:t> de muchas</a:t>
+              <a:t>我看了多少个例子？（第19课）</a:t>
             </a:r>
           </a:p>
           <a:p>
@@ -5053,32 +5069,7 @@
                 </a:solidFill>
                 <a:latin typeface="Nunito Sans"/>
               </a:rPr>
-              <a:t>¿Cuántos casos he mirado? （第19课）</a:t>
-            </a:r>
-          </a:p>
-          <a:p>
-            <a:pPr>
-              <a:spcAft>
-                <a:spcPts val="1170"/>
-              </a:spcAft>
-            </a:pPr>
-            <a:r>
-              <a:rPr sz="2600" b="1">
-                <a:solidFill>
-                  <a:srgbClr val="E8793A"/>
-                </a:solidFill>
-                <a:latin typeface="Nunito Sans"/>
-              </a:rPr>
-              <a:t>• </a:t>
-            </a:r>
-            <a:r>
-              <a:rPr sz="2600" b="0">
-                <a:solidFill>
-                  <a:srgbClr val="1F2A44"/>
-                </a:solidFill>
-                <a:latin typeface="Nunito Sans"/>
-              </a:rPr>
-              <a:t>Lo común: cuidado y vínculo</a:t>
+              <a:t>共同点：关爱和联系</a:t>
             </a:r>
           </a:p>
         </p:txBody>
@@ -7260,7 +7251,7 @@
                 </a:solidFill>
                 <a:latin typeface="Nunito Sans"/>
               </a:rPr>
-              <a:t>Vínculo:</a:t>
+              <a:t>联系：</a:t>
             </a:r>
             <a:r>
               <a:rPr sz="2800" b="0">
@@ -7269,7 +7260,7 @@
                 </a:solidFill>
                 <a:latin typeface="Nunito Sans"/>
               </a:rPr>
-              <a:t> una unión que dura en el tiempo</a:t>
+              <a:t>一种持续很长时间的结合</a:t>
             </a:r>
           </a:p>
           <a:p>
@@ -7294,7 +7285,7 @@
                 </a:solidFill>
                 <a:latin typeface="Nunito Sans"/>
               </a:rPr>
-              <a:t>Cuidado:</a:t>
+              <a:t>关爱：</a:t>
             </a:r>
             <a:r>
               <a:rPr sz="2800" b="0">
@@ -7303,7 +7294,7 @@
                 </a:solidFill>
                 <a:latin typeface="Nunito Sans"/>
               </a:rPr>
-              <a:t> se ocupan unos de otros</a:t>
+              <a:t>彼此照顾</a:t>
             </a:r>
           </a:p>
           <a:p>
@@ -7328,7 +7319,7 @@
                 </a:solidFill>
                 <a:latin typeface="Nunito Sans"/>
               </a:rPr>
-              <a:t>La definición exacta está discutida: esta es una forma de verlo</a:t>
+              <a:t>确切的定义是有争议的：这只是看待它的一种方式</a:t>
             </a:r>
           </a:p>
         </p:txBody>
@@ -7480,7 +7471,7 @@
                 </a:solidFill>
                 <a:latin typeface="Nunito Sans"/>
               </a:rPr>
-              <a:t>Nuclear:</a:t>
+              <a:t>核心家庭：</a:t>
             </a:r>
             <a:r>
               <a:rPr sz="2800" b="0">
@@ -7489,7 +7480,7 @@
                 </a:solidFill>
                 <a:latin typeface="Nunito Sans"/>
               </a:rPr>
-              <a:t> una madre y un padre con sus hijos</a:t>
+              <a:t>一位妈妈和一位爸爸，加上他们的孩子</a:t>
             </a:r>
           </a:p>
           <a:p>
@@ -7514,7 +7505,7 @@
                 </a:solidFill>
                 <a:latin typeface="Nunito Sans"/>
               </a:rPr>
-              <a:t>Monoparental:</a:t>
+              <a:t>单亲家庭：</a:t>
             </a:r>
             <a:r>
               <a:rPr sz="2800" b="0">
@@ -7523,7 +7514,7 @@
                 </a:solidFill>
                 <a:latin typeface="Nunito Sans"/>
               </a:rPr>
-              <a:t> una madre o un padre solo con sus hijos</a:t>
+              <a:t>一位妈妈或一位爸爸单独带着孩子</a:t>
             </a:r>
           </a:p>
           <a:p>
@@ -7548,7 +7539,7 @@
                 </a:solidFill>
                 <a:latin typeface="Nunito Sans"/>
               </a:rPr>
-              <a:t>Reconstituida:</a:t>
+              <a:t>重组家庭：</a:t>
             </a:r>
             <a:r>
               <a:rPr sz="2800" b="0">
@@ -7557,7 +7548,7 @@
                 </a:solidFill>
                 <a:latin typeface="Nunito Sans"/>
               </a:rPr>
-              <a:t> una pareja con hijos de relaciones anteriores</a:t>
+              <a:t>一对伴侣，带着各自前一段关系中的孩子</a:t>
             </a:r>
           </a:p>
           <a:p>
@@ -7582,7 +7573,7 @@
                 </a:solidFill>
                 <a:latin typeface="Nunito Sans"/>
               </a:rPr>
-              <a:t>Homoparental:</a:t>
+              <a:t>同性父母家庭：</a:t>
             </a:r>
             <a:r>
               <a:rPr sz="2800" b="0">
@@ -7591,7 +7582,7 @@
                 </a:solidFill>
                 <a:latin typeface="Nunito Sans"/>
               </a:rPr>
-              <a:t> dos madres o dos padres; en España, matrimonio legal desde 2005</a:t>
+              <a:t>两位妈妈或两位爸爸；在西班牙，自2005年起婚姻合法</a:t>
             </a:r>
           </a:p>
           <a:p>
@@ -7616,7 +7607,7 @@
                 </a:solidFill>
                 <a:latin typeface="Nunito Sans"/>
               </a:rPr>
-              <a:t>Y también: </a:t>
+              <a:t>还有：</a:t>
             </a:r>
             <a:r>
               <a:rPr sz="2800" b="1">
@@ -7625,7 +7616,7 @@
                 </a:solidFill>
                 <a:latin typeface="Nunito Sans"/>
               </a:rPr>
-              <a:t>extensa</a:t>
+              <a:t>大家庭</a:t>
             </a:r>
             <a:r>
               <a:rPr sz="2800" b="0">
@@ -7634,7 +7625,7 @@
                 </a:solidFill>
                 <a:latin typeface="Nunito Sans"/>
               </a:rPr>
-              <a:t> (con abuelos, tíos…), </a:t>
+              <a:t>（有祖父母、叔伯姑姨……）、</a:t>
             </a:r>
             <a:r>
               <a:rPr sz="2800" b="1">
@@ -7643,7 +7634,7 @@
                 </a:solidFill>
                 <a:latin typeface="Nunito Sans"/>
               </a:rPr>
-              <a:t>de acogida</a:t>
+              <a:t>寄养家庭</a:t>
             </a:r>
             <a:r>
               <a:rPr sz="2800" b="0">
@@ -7652,7 +7643,7 @@
                 </a:solidFill>
                 <a:latin typeface="Nunito Sans"/>
               </a:rPr>
-              <a:t>, sin hijos…</a:t>
+              <a:t>、没有孩子的家庭……</a:t>
             </a:r>
           </a:p>
         </p:txBody>
@@ -7804,7 +7795,7 @@
                 </a:solidFill>
                 <a:latin typeface="Nunito Sans"/>
               </a:rPr>
-              <a:t>Cuidado:</a:t>
+              <a:t>关爱：</a:t>
             </a:r>
             <a:r>
               <a:rPr sz="2800" b="0">
@@ -7813,7 +7804,7 @@
                 </a:solidFill>
                 <a:latin typeface="Nunito Sans"/>
               </a:rPr>
-              <a:t> alguien se ocupa de ti: comida, salud, estudios, cariño</a:t>
+              <a:t>有人照顾你：饮食、健康、学习、疼爱</a:t>
             </a:r>
           </a:p>
           <a:p>
@@ -7838,7 +7829,7 @@
                 </a:solidFill>
                 <a:latin typeface="Nunito Sans"/>
               </a:rPr>
-              <a:t>Vínculo:</a:t>
+              <a:t>联系：</a:t>
             </a:r>
             <a:r>
               <a:rPr sz="2800" b="0">
@@ -7847,7 +7838,7 @@
                 </a:solidFill>
                 <a:latin typeface="Nunito Sans"/>
               </a:rPr>
-              <a:t> una relación que dura en el tiempo</a:t>
+              <a:t>一种持续很长时间的关系</a:t>
             </a:r>
           </a:p>
           <a:p>
@@ -7872,7 +7863,7 @@
                 </a:solidFill>
                 <a:latin typeface="Nunito Sans"/>
               </a:rPr>
-              <a:t>Conflictos:</a:t>
+              <a:t>冲突：</a:t>
             </a:r>
             <a:r>
               <a:rPr sz="2800" b="0">
@@ -7881,7 +7872,7 @@
                 </a:solidFill>
                 <a:latin typeface="Nunito Sans"/>
               </a:rPr>
-              <a:t> en todas se discute, se negocian normas y se hacen las paces</a:t>
+              <a:t>每个家庭都会争吵、商量规矩、重归于好</a:t>
             </a:r>
           </a:p>
           <a:p>
@@ -7906,7 +7897,7 @@
                 </a:solidFill>
                 <a:latin typeface="Nunito Sans"/>
               </a:rPr>
-              <a:t>La forma cambia; lo que cuenta es </a:t>
+              <a:t>形式会变；重要的是他们</a:t>
             </a:r>
             <a:r>
               <a:rPr sz="2800" b="1">
@@ -7915,7 +7906,7 @@
                 </a:solidFill>
                 <a:latin typeface="Nunito Sans"/>
               </a:rPr>
-              <a:t>cómo</a:t>
+              <a:t>怎样</a:t>
             </a:r>
             <a:r>
               <a:rPr sz="2800" b="0">
@@ -7924,7 +7915,7 @@
                 </a:solidFill>
                 <a:latin typeface="Nunito Sans"/>
               </a:rPr>
-              <a:t> se tratan</a:t>
+              <a:t>对待彼此</a:t>
             </a:r>
           </a:p>
         </p:txBody>

--- a/curso/pptx/S80.pptx
+++ b/curso/pptx/S80.pptx
@@ -4128,7 +4128,7 @@
                 </a:solidFill>
                 <a:latin typeface="Nunito Sans"/>
               </a:rPr>
-              <a:t>Aitor 和妈妈、外婆住在一起。在课堂上他听到：“正常的家庭是爸爸、妈妈和孩子。”他觉得很别扭。（虚构的例子。）</a:t>
+              <a:t>一个男孩和妈妈、外婆住在一起。在课堂上他听到：“正常的家庭是爸爸、妈妈和孩子。”他觉得很别扭。（虚构的例子。）</a:t>
             </a:r>
           </a:p>
         </p:txBody>
@@ -4269,7 +4269,7 @@
                 </a:solidFill>
                 <a:latin typeface="Nunito Sans"/>
               </a:rPr>
-              <a:t>结论：Aitor 的家庭并不比别人的更不像家庭。这里有关爱，也有联系。</a:t>
+              <a:t>结论：这个男孩的家庭并不比别人的更不像家庭。这里有关爱，也有联系。</a:t>
             </a:r>
           </a:p>
         </p:txBody>
@@ -4455,7 +4455,7 @@
                 </a:solidFill>
                 <a:latin typeface="Nunito Sans"/>
               </a:rPr>
-              <a:t>Dylan 和妈妈、妈妈的伴侣以及伴侣的两个女儿住在一起。他们为浴室和电视遥控器吵架。（虚构的例子。）</a:t>
+              <a:t>一个男孩和妈妈、妈妈的伴侣以及伴侣的两个女儿住在一起。他们为浴室和电视遥控器吵架。（虚构的例子。）</a:t>
             </a:r>
           </a:p>
         </p:txBody>
@@ -5255,7 +5255,7 @@
                 </a:solidFill>
                 <a:latin typeface="Nunito Sans"/>
               </a:rPr>
-              <a:t>在 Kevin 的班里，大多数人和爸爸妈妈住在一起。Kevin 得出结论：“这才是正常的家庭，别的都不是。”（虚构的例子。）</a:t>
+              <a:t>在一个男孩的班里，大多数人和爸爸妈妈住在一起。这个男孩得出结论：“这才是正常的家庭，别的都不是。”（虚构的例子。）</a:t>
             </a:r>
           </a:p>
         </p:txBody>
@@ -5414,7 +5414,7 @@
                 </a:solidFill>
                 <a:latin typeface="Nunito Sans"/>
               </a:rPr>
-              <a:t>一件事常见，并不说明它更好。Kevin 没有察觉自己从一个意思跳到了另一个意思。</a:t>
+              <a:t>一件事常见，并不说明它更好。这个男孩没有察觉自己从一个意思跳到了另一个意思。</a:t>
             </a:r>
           </a:p>
           <a:p>
